--- a/challenge_03_data_signal/slides/presentation_deck.pptx
+++ b/challenge_03_data_signal/slides/presentation_deck.pptx
@@ -3523,49 +3523,6 @@
           </a:p>
         </p:txBody>
       </p:sp>
-      <p:sp>
-        <p:nvSpPr>
-          <p:cNvPr id="14" name="AILabel"/>
-          <p:cNvSpPr txBox="1"/>
-          <p:nvPr/>
-        </p:nvSpPr>
-        <p:spPr>
-          <a:xfrm>
-            <a:off x="9611695" y="6278000"/>
-            <a:ext cx="2400000" cy="400000"/>
-          </a:xfrm>
-          <a:prstGeom prst="rect">
-            <a:avLst/>
-          </a:prstGeom>
-          <a:solidFill>
-            <a:srgbClr val="000000">
-              <a:alpha val="50000"/>
-            </a:srgbClr>
-          </a:solidFill>
-          <a:ln w="12700">
-            <a:solidFill>
-              <a:srgbClr val="FFFFFF"/>
-            </a:solidFill>
-          </a:ln>
-        </p:spPr>
-        <p:txBody>
-          <a:bodyPr wrap="square" rtlCol="0" anchor="ctr" lIns="91440" tIns="45720" rIns="91440" bIns="45720"/>
-          <a:lstStyle/>
-          <a:p>
-            <a:pPr algn="ctr"/>
-            <a:r>
-              <a:rPr lang="zh-CN" sz="1400" b="1" dirty="0">
-                <a:solidFill>
-                  <a:srgbClr val="FFFFFF"/>
-                </a:solidFill>
-                <a:latin typeface="Arial"/>
-                <a:ea typeface="SimSun"/>
-              </a:rPr>
-              <a:t>含 AI 生成</a:t>
-            </a:r>
-          </a:p>
-        </p:txBody>
-      </p:sp>
     </p:spTree>
   </p:cSld>
   <p:clrMapOvr>
@@ -4668,7 +4625,7 @@
                 </a:solidFill>
                 <a:latin typeface="Microsoft YaHei"/>
               </a:rPr>
-              <a:t>价格弹性</a:t>
+              <a:t>价格-数量相关</a:t>
             </a:r>
           </a:p>
         </p:txBody>
@@ -4739,8 +4696,8 @@
                 <a:latin typeface="Microsoft YaHei"/>
               </a:rPr>
               <a:t>|r| &lt; 0.02
-需求由日历驱动
-而非价格</a:t>
+描述性、非因果
+需求由日历驱动</a:t>
             </a:r>
           </a:p>
         </p:txBody>
